--- a/outputs/ophthalmology-batch-20261011/endothelium/A4_color_editable.pptx
+++ b/outputs/ophthalmology-batch-20261011/endothelium/A4_color_editable.pptx
@@ -647,7 +647,7 @@
           <a:p/>
           <a:p>
             <a:r>
-              <a:t>endothelium-12 气体固定：过滤空气或10%~14% C3F8固定；气少/吸收快增脱离，过多致瞳孔阻滞。复杂DSEK可黏弹剂，DMEK不能黏弹剂固定。</a:t>
+              <a:t>endothelium-12 气体固定：过滤空气或10%~14% C₃F₈固定；气少/吸收快增脱离，过多致瞳孔阻滞。复杂DSEK可黏弹剂，DMEK不能使用黏弹剂固定植片。</a:t>
             </a:r>
           </a:p>
           <a:p>
@@ -759,7 +759,7 @@
           <a:p/>
           <a:p>
             <a:r>
-              <a:t>endothelium-16 阻滞性青光眼：推荐6:00周边虹膜切除防阻滞；术后早期2~6 h密切看眼压，必要时释过量前房气体，避免不可逆损伤。具体眼压数值切点未明确。</a:t>
+              <a:t>endothelium-16 阻滞性青光眼：推荐6点钟方位周边虹膜切除防阻滞；术后早期2~6 h密切看眼压，必要时释过量前房气体，避免不可逆损伤。具体眼压数值切点未明确。</a:t>
             </a:r>
           </a:p>
           <a:p>
@@ -791,7 +791,7 @@
           <a:p/>
           <a:p>
             <a:r>
-              <a:t>endothelium-18 术后检查：第1天气体填大部前房但坐位避开6:00虹膜切除口；可疑脱离及时前节OCT；透明后尽早内皮计数并定期复查。</a:t>
+              <a:t>endothelium-18 术后检查：第1天气体填大部前房但坐位避开6点钟方位虹膜切除口；可疑脱离及时前节OCT；透明后尽早内皮计数并定期复查。</a:t>
             </a:r>
           </a:p>
           <a:p>
@@ -4708,7 +4708,7 @@
       </p:sp>
       <p:sp>
         <p:nvSpPr>
-          <p:cNvPr id="19" name="辨方向、减少接触；空气或10%~14% C3F8固定；周边虹膜切除防阻滞。DMEK不能黏弹剂固定。"/>
+          <p:cNvPr id="19" name="辨方向、减少接触；空气或10%~14% C₃F₈固定；周边虹膜切除防阻滞。DMEK不能使用黏弹剂固定"/>
           <p:cNvSpPr txBox="1"/>
           <p:nvPr/>
         </p:nvSpPr>
@@ -4748,7 +4748,51 @@
                 <a:ea typeface="Microsoft YaHei"/>
                 <a:cs typeface="Microsoft YaHei"/>
               </a:rPr>
-              <a:t>辨方向、减少接触；空气或10%~14% C3F8固定；周边虹膜</a:t>
+              <a:t>辨方向、减少接触；空气或10%~14% C</a:t>
+            </a:r>
+            <a:r>
+              <a:rPr sz="950" b="0" lang="zh-CN">
+                <a:solidFill>
+                  <a:srgbClr val="1E2E3B"/>
+                </a:solidFill>
+                <a:latin typeface="Arial"/>
+                <a:ea typeface="Arial"/>
+                <a:cs typeface="Arial"/>
+              </a:rPr>
+              <a:t>₃</a:t>
+            </a:r>
+            <a:r>
+              <a:rPr sz="950" b="0" lang="zh-CN">
+                <a:solidFill>
+                  <a:srgbClr val="1E2E3B"/>
+                </a:solidFill>
+                <a:latin typeface="Microsoft YaHei"/>
+                <a:ea typeface="Microsoft YaHei"/>
+                <a:cs typeface="Microsoft YaHei"/>
+              </a:rPr>
+              <a:t>F</a:t>
+            </a:r>
+            <a:r>
+              <a:rPr sz="950" b="0" lang="zh-CN">
+                <a:solidFill>
+                  <a:srgbClr val="1E2E3B"/>
+                </a:solidFill>
+                <a:latin typeface="Arial"/>
+                <a:ea typeface="Arial"/>
+                <a:cs typeface="Arial"/>
+              </a:rPr>
+              <a:t>₈</a:t>
+            </a:r>
+            <a:r>
+              <a:rPr sz="950" b="0" lang="zh-CN">
+                <a:solidFill>
+                  <a:srgbClr val="1E2E3B"/>
+                </a:solidFill>
+                <a:latin typeface="Microsoft YaHei"/>
+                <a:ea typeface="Microsoft YaHei"/>
+                <a:cs typeface="Microsoft YaHei"/>
+              </a:rPr>
+              <a:t>固定；周边虹膜切</a:t>
             </a:r>
           </a:p>
           <a:p>
@@ -4772,7 +4816,7 @@
                 <a:ea typeface="Microsoft YaHei"/>
                 <a:cs typeface="Microsoft YaHei"/>
               </a:rPr>
-              <a:t>切除防阻滞。DMEK不能黏弹剂固定。</a:t>
+              <a:t>除防阻滞。DMEK不能使用黏弹剂固定。</a:t>
             </a:r>
           </a:p>
         </p:txBody>
@@ -5756,7 +5800,7 @@
       </p:sp>
       <p:sp>
         <p:nvSpPr>
-          <p:cNvPr id="39" name="辨方向、减少接触；空气或10%~14% C3F8固定；周边虹膜切除防阻滞。DMEK不能黏弹剂固定。"/>
+          <p:cNvPr id="39" name="辨方向、减少接触；空气或10%~14% C₃F₈固定；周边虹膜切除防阻滞。DMEK不能使用黏弹剂固定"/>
           <p:cNvSpPr txBox="1"/>
           <p:nvPr/>
         </p:nvSpPr>
@@ -5796,7 +5840,51 @@
                 <a:ea typeface="Microsoft YaHei"/>
                 <a:cs typeface="Microsoft YaHei"/>
               </a:rPr>
-              <a:t>辨方向、减少接触；空气或10%~14% C3F8固定；周边虹膜</a:t>
+              <a:t>辨方向、减少接触；空气或10%~14% C</a:t>
+            </a:r>
+            <a:r>
+              <a:rPr sz="950" b="0" lang="zh-CN">
+                <a:solidFill>
+                  <a:srgbClr val="1E2E3B"/>
+                </a:solidFill>
+                <a:latin typeface="Arial"/>
+                <a:ea typeface="Arial"/>
+                <a:cs typeface="Arial"/>
+              </a:rPr>
+              <a:t>₃</a:t>
+            </a:r>
+            <a:r>
+              <a:rPr sz="950" b="0" lang="zh-CN">
+                <a:solidFill>
+                  <a:srgbClr val="1E2E3B"/>
+                </a:solidFill>
+                <a:latin typeface="Microsoft YaHei"/>
+                <a:ea typeface="Microsoft YaHei"/>
+                <a:cs typeface="Microsoft YaHei"/>
+              </a:rPr>
+              <a:t>F</a:t>
+            </a:r>
+            <a:r>
+              <a:rPr sz="950" b="0" lang="zh-CN">
+                <a:solidFill>
+                  <a:srgbClr val="1E2E3B"/>
+                </a:solidFill>
+                <a:latin typeface="Arial"/>
+                <a:ea typeface="Arial"/>
+                <a:cs typeface="Arial"/>
+              </a:rPr>
+              <a:t>₈</a:t>
+            </a:r>
+            <a:r>
+              <a:rPr sz="950" b="0" lang="zh-CN">
+                <a:solidFill>
+                  <a:srgbClr val="1E2E3B"/>
+                </a:solidFill>
+                <a:latin typeface="Microsoft YaHei"/>
+                <a:ea typeface="Microsoft YaHei"/>
+                <a:cs typeface="Microsoft YaHei"/>
+              </a:rPr>
+              <a:t>固定；周边虹膜切</a:t>
             </a:r>
           </a:p>
           <a:p>
@@ -5820,7 +5908,7 @@
                 <a:ea typeface="Microsoft YaHei"/>
                 <a:cs typeface="Microsoft YaHei"/>
               </a:rPr>
-              <a:t>切除防阻滞。DMEK不能黏弹剂固定。</a:t>
+              <a:t>除防阻滞。DMEK不能使用黏弹剂固定。</a:t>
             </a:r>
           </a:p>
         </p:txBody>
@@ -6804,7 +6892,7 @@
       </p:sp>
       <p:sp>
         <p:nvSpPr>
-          <p:cNvPr id="59" name="辨方向、减少接触；空气或10%~14% C3F8固定；周边虹膜切除防阻滞。DMEK不能黏弹剂固定。"/>
+          <p:cNvPr id="59" name="辨方向、减少接触；空气或10%~14% C₃F₈固定；周边虹膜切除防阻滞。DMEK不能使用黏弹剂固定"/>
           <p:cNvSpPr txBox="1"/>
           <p:nvPr/>
         </p:nvSpPr>
@@ -6844,7 +6932,51 @@
                 <a:ea typeface="Microsoft YaHei"/>
                 <a:cs typeface="Microsoft YaHei"/>
               </a:rPr>
-              <a:t>辨方向、减少接触；空气或10%~14% C3F8固定；周边虹膜</a:t>
+              <a:t>辨方向、减少接触；空气或10%~14% C</a:t>
+            </a:r>
+            <a:r>
+              <a:rPr sz="950" b="0" lang="zh-CN">
+                <a:solidFill>
+                  <a:srgbClr val="1E2E3B"/>
+                </a:solidFill>
+                <a:latin typeface="Arial"/>
+                <a:ea typeface="Arial"/>
+                <a:cs typeface="Arial"/>
+              </a:rPr>
+              <a:t>₃</a:t>
+            </a:r>
+            <a:r>
+              <a:rPr sz="950" b="0" lang="zh-CN">
+                <a:solidFill>
+                  <a:srgbClr val="1E2E3B"/>
+                </a:solidFill>
+                <a:latin typeface="Microsoft YaHei"/>
+                <a:ea typeface="Microsoft YaHei"/>
+                <a:cs typeface="Microsoft YaHei"/>
+              </a:rPr>
+              <a:t>F</a:t>
+            </a:r>
+            <a:r>
+              <a:rPr sz="950" b="0" lang="zh-CN">
+                <a:solidFill>
+                  <a:srgbClr val="1E2E3B"/>
+                </a:solidFill>
+                <a:latin typeface="Arial"/>
+                <a:ea typeface="Arial"/>
+                <a:cs typeface="Arial"/>
+              </a:rPr>
+              <a:t>₈</a:t>
+            </a:r>
+            <a:r>
+              <a:rPr sz="950" b="0" lang="zh-CN">
+                <a:solidFill>
+                  <a:srgbClr val="1E2E3B"/>
+                </a:solidFill>
+                <a:latin typeface="Microsoft YaHei"/>
+                <a:ea typeface="Microsoft YaHei"/>
+                <a:cs typeface="Microsoft YaHei"/>
+              </a:rPr>
+              <a:t>固定；周边虹膜切</a:t>
             </a:r>
           </a:p>
           <a:p>
@@ -6868,7 +7000,7 @@
                 <a:ea typeface="Microsoft YaHei"/>
                 <a:cs typeface="Microsoft YaHei"/>
               </a:rPr>
-              <a:t>切除防阻滞。DMEK不能黏弹剂固定。</a:t>
+              <a:t>除防阻滞。DMEK不能使用黏弹剂固定。</a:t>
             </a:r>
           </a:p>
         </p:txBody>
@@ -7852,7 +7984,7 @@
       </p:sp>
       <p:sp>
         <p:nvSpPr>
-          <p:cNvPr id="79" name="辨方向、减少接触；空气或10%~14% C3F8固定；周边虹膜切除防阻滞。DMEK不能黏弹剂固定。"/>
+          <p:cNvPr id="79" name="辨方向、减少接触；空气或10%~14% C₃F₈固定；周边虹膜切除防阻滞。DMEK不能使用黏弹剂固定"/>
           <p:cNvSpPr txBox="1"/>
           <p:nvPr/>
         </p:nvSpPr>
@@ -7892,7 +8024,51 @@
                 <a:ea typeface="Microsoft YaHei"/>
                 <a:cs typeface="Microsoft YaHei"/>
               </a:rPr>
-              <a:t>辨方向、减少接触；空气或10%~14% C3F8固定；周边虹膜</a:t>
+              <a:t>辨方向、减少接触；空气或10%~14% C</a:t>
+            </a:r>
+            <a:r>
+              <a:rPr sz="950" b="0" lang="zh-CN">
+                <a:solidFill>
+                  <a:srgbClr val="1E2E3B"/>
+                </a:solidFill>
+                <a:latin typeface="Arial"/>
+                <a:ea typeface="Arial"/>
+                <a:cs typeface="Arial"/>
+              </a:rPr>
+              <a:t>₃</a:t>
+            </a:r>
+            <a:r>
+              <a:rPr sz="950" b="0" lang="zh-CN">
+                <a:solidFill>
+                  <a:srgbClr val="1E2E3B"/>
+                </a:solidFill>
+                <a:latin typeface="Microsoft YaHei"/>
+                <a:ea typeface="Microsoft YaHei"/>
+                <a:cs typeface="Microsoft YaHei"/>
+              </a:rPr>
+              <a:t>F</a:t>
+            </a:r>
+            <a:r>
+              <a:rPr sz="950" b="0" lang="zh-CN">
+                <a:solidFill>
+                  <a:srgbClr val="1E2E3B"/>
+                </a:solidFill>
+                <a:latin typeface="Arial"/>
+                <a:ea typeface="Arial"/>
+                <a:cs typeface="Arial"/>
+              </a:rPr>
+              <a:t>₈</a:t>
+            </a:r>
+            <a:r>
+              <a:rPr sz="950" b="0" lang="zh-CN">
+                <a:solidFill>
+                  <a:srgbClr val="1E2E3B"/>
+                </a:solidFill>
+                <a:latin typeface="Microsoft YaHei"/>
+                <a:ea typeface="Microsoft YaHei"/>
+                <a:cs typeface="Microsoft YaHei"/>
+              </a:rPr>
+              <a:t>固定；周边虹膜切</a:t>
             </a:r>
           </a:p>
           <a:p>
@@ -7916,7 +8092,7 @@
                 <a:ea typeface="Microsoft YaHei"/>
                 <a:cs typeface="Microsoft YaHei"/>
               </a:rPr>
-              <a:t>切除防阻滞。DMEK不能黏弹剂固定。</a:t>
+              <a:t>除防阻滞。DMEK不能使用黏弹剂固定。</a:t>
             </a:r>
           </a:p>
         </p:txBody>
@@ -8436,7 +8612,7 @@
       </p:sp>
       <p:sp>
         <p:nvSpPr>
-          <p:cNvPr id="7" name="DSEK&gt;1/3或DMEK&gt;1/4面积再注气；&lt;1/4可观察，扩大/水肿不退再注。DSEK中间区间及"/>
+          <p:cNvPr id="7" name="DSEK脱离&gt;1/3或DMEK脱离&gt;1/4面积再注气；&lt;1/4可观察，扩大/水肿不退再注。DSEK中"/>
           <p:cNvSpPr txBox="1"/>
           <p:nvPr/>
         </p:nvSpPr>
@@ -8476,7 +8652,7 @@
                 <a:ea typeface="Microsoft YaHei"/>
                 <a:cs typeface="Microsoft YaHei"/>
               </a:rPr>
-              <a:t>DSEK&gt;1/3或DMEK&gt;1/4面积再注气；&lt;1/4可观察，扩大/水</a:t>
+              <a:t>DSEK脱离&gt;1/3或DMEK脱离&gt;1/4面积再注气；&lt;1/4可观察，</a:t>
             </a:r>
           </a:p>
           <a:p>
@@ -8500,7 +8676,7 @@
                 <a:ea typeface="Microsoft YaHei"/>
                 <a:cs typeface="Microsoft YaHei"/>
               </a:rPr>
-              <a:t>肿不退再注。DSEK中间区间及边界原文未明确。</a:t>
+              <a:t>扩大/水肿不退再注。DSEK中间区间及边界原文未明确。</a:t>
             </a:r>
           </a:p>
         </p:txBody>
@@ -8856,7 +9032,7 @@
       </p:sp>
       <p:sp>
         <p:nvSpPr>
-          <p:cNvPr id="15" name="保持24 h足量气体，坐位避开6:00虹膜切除口；可疑脱离做前节OCT；透明后尽早内皮计数、定期复查"/>
+          <p:cNvPr id="15" name="保持24 h足量气体，坐位避开6点钟方位虹膜切除口；可疑脱离做前节OCT；透明后尽早内皮计数、定期复"/>
           <p:cNvSpPr txBox="1"/>
           <p:nvPr/>
         </p:nvSpPr>
@@ -8896,7 +9072,7 @@
                 <a:ea typeface="Microsoft YaHei"/>
                 <a:cs typeface="Microsoft YaHei"/>
               </a:rPr>
-              <a:t>保持24 h足量气体，坐位避开6:00虹膜切除口；可疑脱离做</a:t>
+              <a:t>保持24 h足量气体，坐位避开6点钟方位虹膜切除口；可疑脱</a:t>
             </a:r>
           </a:p>
           <a:p>
@@ -8920,7 +9096,7 @@
                 <a:ea typeface="Microsoft YaHei"/>
                 <a:cs typeface="Microsoft YaHei"/>
               </a:rPr>
-              <a:t>前节OCT；透明后尽早内皮计数、定期复查。</a:t>
+              <a:t>离做前节OCT；透明后尽早内皮计数、定期复查。</a:t>
             </a:r>
           </a:p>
         </p:txBody>
@@ -9484,7 +9660,7 @@
       </p:sp>
       <p:sp>
         <p:nvSpPr>
-          <p:cNvPr id="27" name="DSEK&gt;1/3或DMEK&gt;1/4面积再注气；&lt;1/4可观察，扩大/水肿不退再注。DSEK中间区间及"/>
+          <p:cNvPr id="27" name="DSEK脱离&gt;1/3或DMEK脱离&gt;1/4面积再注气；&lt;1/4可观察，扩大/水肿不退再注。DSEK中"/>
           <p:cNvSpPr txBox="1"/>
           <p:nvPr/>
         </p:nvSpPr>
@@ -9524,7 +9700,7 @@
                 <a:ea typeface="Microsoft YaHei"/>
                 <a:cs typeface="Microsoft YaHei"/>
               </a:rPr>
-              <a:t>DSEK&gt;1/3或DMEK&gt;1/4面积再注气；&lt;1/4可观察，扩大/水</a:t>
+              <a:t>DSEK脱离&gt;1/3或DMEK脱离&gt;1/4面积再注气；&lt;1/4可观察，</a:t>
             </a:r>
           </a:p>
           <a:p>
@@ -9548,7 +9724,7 @@
                 <a:ea typeface="Microsoft YaHei"/>
                 <a:cs typeface="Microsoft YaHei"/>
               </a:rPr>
-              <a:t>肿不退再注。DSEK中间区间及边界原文未明确。</a:t>
+              <a:t>扩大/水肿不退再注。DSEK中间区间及边界原文未明确。</a:t>
             </a:r>
           </a:p>
         </p:txBody>
@@ -9904,7 +10080,7 @@
       </p:sp>
       <p:sp>
         <p:nvSpPr>
-          <p:cNvPr id="35" name="保持24 h足量气体，坐位避开6:00虹膜切除口；可疑脱离做前节OCT；透明后尽早内皮计数、定期复查"/>
+          <p:cNvPr id="35" name="保持24 h足量气体，坐位避开6点钟方位虹膜切除口；可疑脱离做前节OCT；透明后尽早内皮计数、定期复"/>
           <p:cNvSpPr txBox="1"/>
           <p:nvPr/>
         </p:nvSpPr>
@@ -9944,7 +10120,7 @@
                 <a:ea typeface="Microsoft YaHei"/>
                 <a:cs typeface="Microsoft YaHei"/>
               </a:rPr>
-              <a:t>保持24 h足量气体，坐位避开6:00虹膜切除口；可疑脱离做</a:t>
+              <a:t>保持24 h足量气体，坐位避开6点钟方位虹膜切除口；可疑脱</a:t>
             </a:r>
           </a:p>
           <a:p>
@@ -9968,7 +10144,7 @@
                 <a:ea typeface="Microsoft YaHei"/>
                 <a:cs typeface="Microsoft YaHei"/>
               </a:rPr>
-              <a:t>前节OCT；透明后尽早内皮计数、定期复查。</a:t>
+              <a:t>离做前节OCT；透明后尽早内皮计数、定期复查。</a:t>
             </a:r>
           </a:p>
         </p:txBody>
@@ -10532,7 +10708,7 @@
       </p:sp>
       <p:sp>
         <p:nvSpPr>
-          <p:cNvPr id="47" name="DSEK&gt;1/3或DMEK&gt;1/4面积再注气；&lt;1/4可观察，扩大/水肿不退再注。DSEK中间区间及"/>
+          <p:cNvPr id="47" name="DSEK脱离&gt;1/3或DMEK脱离&gt;1/4面积再注气；&lt;1/4可观察，扩大/水肿不退再注。DSEK中"/>
           <p:cNvSpPr txBox="1"/>
           <p:nvPr/>
         </p:nvSpPr>
@@ -10572,7 +10748,7 @@
                 <a:ea typeface="Microsoft YaHei"/>
                 <a:cs typeface="Microsoft YaHei"/>
               </a:rPr>
-              <a:t>DSEK&gt;1/3或DMEK&gt;1/4面积再注气；&lt;1/4可观察，扩大/水</a:t>
+              <a:t>DSEK脱离&gt;1/3或DMEK脱离&gt;1/4面积再注气；&lt;1/4可观察，</a:t>
             </a:r>
           </a:p>
           <a:p>
@@ -10596,7 +10772,7 @@
                 <a:ea typeface="Microsoft YaHei"/>
                 <a:cs typeface="Microsoft YaHei"/>
               </a:rPr>
-              <a:t>肿不退再注。DSEK中间区间及边界原文未明确。</a:t>
+              <a:t>扩大/水肿不退再注。DSEK中间区间及边界原文未明确。</a:t>
             </a:r>
           </a:p>
         </p:txBody>
@@ -10952,7 +11128,7 @@
       </p:sp>
       <p:sp>
         <p:nvSpPr>
-          <p:cNvPr id="55" name="保持24 h足量气体，坐位避开6:00虹膜切除口；可疑脱离做前节OCT；透明后尽早内皮计数、定期复查"/>
+          <p:cNvPr id="55" name="保持24 h足量气体，坐位避开6点钟方位虹膜切除口；可疑脱离做前节OCT；透明后尽早内皮计数、定期复"/>
           <p:cNvSpPr txBox="1"/>
           <p:nvPr/>
         </p:nvSpPr>
@@ -10992,7 +11168,7 @@
                 <a:ea typeface="Microsoft YaHei"/>
                 <a:cs typeface="Microsoft YaHei"/>
               </a:rPr>
-              <a:t>保持24 h足量气体，坐位避开6:00虹膜切除口；可疑脱离做</a:t>
+              <a:t>保持24 h足量气体，坐位避开6点钟方位虹膜切除口；可疑脱</a:t>
             </a:r>
           </a:p>
           <a:p>
@@ -11016,7 +11192,7 @@
                 <a:ea typeface="Microsoft YaHei"/>
                 <a:cs typeface="Microsoft YaHei"/>
               </a:rPr>
-              <a:t>前节OCT；透明后尽早内皮计数、定期复查。</a:t>
+              <a:t>离做前节OCT；透明后尽早内皮计数、定期复查。</a:t>
             </a:r>
           </a:p>
         </p:txBody>
@@ -11580,7 +11756,7 @@
       </p:sp>
       <p:sp>
         <p:nvSpPr>
-          <p:cNvPr id="67" name="DSEK&gt;1/3或DMEK&gt;1/4面积再注气；&lt;1/4可观察，扩大/水肿不退再注。DSEK中间区间及"/>
+          <p:cNvPr id="67" name="DSEK脱离&gt;1/3或DMEK脱离&gt;1/4面积再注气；&lt;1/4可观察，扩大/水肿不退再注。DSEK中"/>
           <p:cNvSpPr txBox="1"/>
           <p:nvPr/>
         </p:nvSpPr>
@@ -11620,7 +11796,7 @@
                 <a:ea typeface="Microsoft YaHei"/>
                 <a:cs typeface="Microsoft YaHei"/>
               </a:rPr>
-              <a:t>DSEK&gt;1/3或DMEK&gt;1/4面积再注气；&lt;1/4可观察，扩大/水</a:t>
+              <a:t>DSEK脱离&gt;1/3或DMEK脱离&gt;1/4面积再注气；&lt;1/4可观察，</a:t>
             </a:r>
           </a:p>
           <a:p>
@@ -11644,7 +11820,7 @@
                 <a:ea typeface="Microsoft YaHei"/>
                 <a:cs typeface="Microsoft YaHei"/>
               </a:rPr>
-              <a:t>肿不退再注。DSEK中间区间及边界原文未明确。</a:t>
+              <a:t>扩大/水肿不退再注。DSEK中间区间及边界原文未明确。</a:t>
             </a:r>
           </a:p>
         </p:txBody>
@@ -12000,7 +12176,7 @@
       </p:sp>
       <p:sp>
         <p:nvSpPr>
-          <p:cNvPr id="75" name="保持24 h足量气体，坐位避开6:00虹膜切除口；可疑脱离做前节OCT；透明后尽早内皮计数、定期复查"/>
+          <p:cNvPr id="75" name="保持24 h足量气体，坐位避开6点钟方位虹膜切除口；可疑脱离做前节OCT；透明后尽早内皮计数、定期复"/>
           <p:cNvSpPr txBox="1"/>
           <p:nvPr/>
         </p:nvSpPr>
@@ -12040,7 +12216,7 @@
                 <a:ea typeface="Microsoft YaHei"/>
                 <a:cs typeface="Microsoft YaHei"/>
               </a:rPr>
-              <a:t>保持24 h足量气体，坐位避开6:00虹膜切除口；可疑脱离做</a:t>
+              <a:t>保持24 h足量气体，坐位避开6点钟方位虹膜切除口；可疑脱</a:t>
             </a:r>
           </a:p>
           <a:p>
@@ -12064,7 +12240,7 @@
                 <a:ea typeface="Microsoft YaHei"/>
                 <a:cs typeface="Microsoft YaHei"/>
               </a:rPr>
-              <a:t>前节OCT；透明后尽早内皮计数、定期复查。</a:t>
+              <a:t>离做前节OCT；透明后尽早内皮计数、定期复查。</a:t>
             </a:r>
           </a:p>
         </p:txBody>
